--- a/Aulas/Atualizado/Tecnologias por trás da Web.pptx
+++ b/Aulas/Atualizado/Tecnologias por trás da Web.pptx
@@ -168,9 +168,38 @@
 <file path=ppt/revisionInfo.xml><?xml version="1.0" encoding="utf-8"?>
 <p1510:revInfo xmlns:a="http://schemas.openxmlformats.org/drawingml/2006/main" xmlns:r="http://schemas.openxmlformats.org/officeDocument/2006/relationships" xmlns:p1510="http://schemas.microsoft.com/office/powerpoint/2015/10/main">
   <p1510:revLst>
-    <p1510:client id="{0CBBC274-E5CA-4492-A382-1D5DAF438366}" v="149" dt="2025-05-13T18:13:27.072"/>
+    <p1510:client id="{A08F7A1D-69EE-49D1-A891-B8DAA999176A}" v="10" dt="2025-05-30T20:56:18.334"/>
   </p1510:revLst>
 </p1510:revInfo>
+</file>
+
+<file path=ppt/changesInfos/changesInfo1.xml><?xml version="1.0" encoding="utf-8"?>
+<pc:chgInfo xmlns:a="http://schemas.openxmlformats.org/drawingml/2006/main" xmlns:r="http://schemas.openxmlformats.org/officeDocument/2006/relationships" xmlns:ac="http://schemas.microsoft.com/office/drawing/2013/main/command" xmlns:pc="http://schemas.microsoft.com/office/powerpoint/2013/main/command">
+  <pc:docChgLst>
+    <pc:chgData name="Nathália Nogueira" userId="72fb52ae66b9bc35" providerId="LiveId" clId="{A08F7A1D-69EE-49D1-A891-B8DAA999176A}"/>
+    <pc:docChg chg="modSld">
+      <pc:chgData name="Nathália Nogueira" userId="72fb52ae66b9bc35" providerId="LiveId" clId="{A08F7A1D-69EE-49D1-A891-B8DAA999176A}" dt="2025-05-30T20:56:18.333" v="9" actId="20577"/>
+      <pc:docMkLst>
+        <pc:docMk/>
+      </pc:docMkLst>
+      <pc:sldChg chg="modSp">
+        <pc:chgData name="Nathália Nogueira" userId="72fb52ae66b9bc35" providerId="LiveId" clId="{A08F7A1D-69EE-49D1-A891-B8DAA999176A}" dt="2025-05-30T20:56:18.333" v="9" actId="20577"/>
+        <pc:sldMkLst>
+          <pc:docMk/>
+          <pc:sldMk cId="0" sldId="261"/>
+        </pc:sldMkLst>
+        <pc:spChg chg="mod">
+          <ac:chgData name="Nathália Nogueira" userId="72fb52ae66b9bc35" providerId="LiveId" clId="{A08F7A1D-69EE-49D1-A891-B8DAA999176A}" dt="2025-05-30T20:56:18.333" v="9" actId="20577"/>
+          <ac:spMkLst>
+            <pc:docMk/>
+            <pc:sldMk cId="0" sldId="261"/>
+            <ac:spMk id="162" creationId="{00000000-0000-0000-0000-000000000000}"/>
+          </ac:spMkLst>
+        </pc:spChg>
+      </pc:sldChg>
+    </pc:docChg>
+  </pc:docChgLst>
+</pc:chgInfo>
 </file>
 
 <file path=ppt/diagrams/colors1.xml><?xml version="1.0" encoding="utf-8"?>
@@ -17278,7 +17307,7 @@
           <a:p>
             <a:fld id="{7A9A650A-8BD1-4FDE-9899-1C20DF4B7708}" type="datetimeFigureOut">
               <a:rPr lang="en-US" smtClean="0"/>
-              <a:t>5/19/25</a:t>
+              <a:t>5/30/2025</a:t>
             </a:fld>
             <a:endParaRPr lang="en-US" dirty="0"/>
           </a:p>
@@ -17643,7 +17672,7 @@
           <a:p>
             <a:fld id="{DC107E61-D2F8-452B-B53A-91FE1E439E24}" type="datetimeFigureOut">
               <a:rPr lang="en-US" smtClean="0"/>
-              <a:t>5/19/25</a:t>
+              <a:t>5/30/2025</a:t>
             </a:fld>
             <a:endParaRPr lang="en-US" dirty="0"/>
           </a:p>
@@ -18214,7 +18243,7 @@
           <a:p>
             <a:fld id="{A7543A57-F65A-4C42-9156-7629C10666E9}" type="datetimeFigureOut">
               <a:rPr lang="en-US" smtClean="0"/>
-              <a:t>5/19/25</a:t>
+              <a:t>5/30/2025</a:t>
             </a:fld>
             <a:endParaRPr lang="en-US" dirty="0"/>
           </a:p>
@@ -18639,7 +18668,7 @@
           <a:p>
             <a:fld id="{969FBF0B-319E-4F95-BA43-902EB3DC9783}" type="datetimeFigureOut">
               <a:rPr lang="en-US" smtClean="0"/>
-              <a:t>5/19/25</a:t>
+              <a:t>5/30/2025</a:t>
             </a:fld>
             <a:endParaRPr lang="en-US" dirty="0"/>
           </a:p>
@@ -18758,7 +18787,7 @@
           <a:p>
             <a:fld id="{081158B3-6703-4BBB-A09E-33FD65E7DB24}" type="datetimeFigureOut">
               <a:rPr lang="en-US" smtClean="0"/>
-              <a:t>5/19/25</a:t>
+              <a:t>5/30/2025</a:t>
             </a:fld>
             <a:endParaRPr lang="en-US" dirty="0"/>
           </a:p>
@@ -18854,7 +18883,7 @@
           <a:p>
             <a:fld id="{AFFE9955-2DD3-491E-92B6-7018343227CE}" type="datetimeFigureOut">
               <a:rPr lang="en-US" smtClean="0"/>
-              <a:t>5/19/25</a:t>
+              <a:t>5/30/2025</a:t>
             </a:fld>
             <a:endParaRPr lang="en-US" dirty="0"/>
           </a:p>
@@ -19145,7 +19174,7 @@
           <a:p>
             <a:fld id="{19888A28-1D79-4F41-9521-CF26BB2C7EE3}" type="datetimeFigureOut">
               <a:rPr lang="en-US" smtClean="0"/>
-              <a:t>5/19/25</a:t>
+              <a:t>5/30/2025</a:t>
             </a:fld>
             <a:endParaRPr lang="en-US" dirty="0"/>
           </a:p>
@@ -19418,7 +19447,7 @@
           <a:p>
             <a:fld id="{43BD9950-AF07-4F2A-A949-E1C816A93B30}" type="datetimeFigureOut">
               <a:rPr lang="en-US" smtClean="0"/>
-              <a:t>5/19/25</a:t>
+              <a:t>5/30/2025</a:t>
             </a:fld>
             <a:endParaRPr lang="en-US" dirty="0"/>
           </a:p>
@@ -19589,7 +19618,7 @@
           <a:p>
             <a:fld id="{4DA3262D-6073-4A30-973C-53BE1D29884A}" type="datetimeFigureOut">
               <a:rPr lang="en-US" smtClean="0"/>
-              <a:t>5/19/25</a:t>
+              <a:t>5/30/2025</a:t>
             </a:fld>
             <a:endParaRPr lang="en-US" dirty="0"/>
           </a:p>
@@ -19770,7 +19799,7 @@
           <a:p>
             <a:fld id="{C00AB0AF-EEE9-4421-9298-EB11A547E63F}" type="datetimeFigureOut">
               <a:rPr lang="en-US" smtClean="0"/>
-              <a:t>5/19/25</a:t>
+              <a:t>5/30/2025</a:t>
             </a:fld>
             <a:endParaRPr lang="en-US" dirty="0"/>
           </a:p>
@@ -22572,7 +22601,7 @@
           <a:p>
             <a:fld id="{34A43A2E-6632-4F9D-8728-2CF59ACBBE60}" type="datetimeFigureOut">
               <a:rPr lang="en-US" dirty="0"/>
-              <a:t>5/19/25</a:t>
+              <a:t>5/30/2025</a:t>
             </a:fld>
             <a:endParaRPr lang="en-US" dirty="0"/>
           </a:p>
@@ -27771,14 +27800,14 @@
               <a:buNone/>
             </a:pPr>
             <a:r>
-              <a:rPr lang="pt-BR" sz="1050" b="1"/>
-              <a:t>www.impacta.edu.br</a:t>
-            </a:r>
-            <a:r>
-              <a:rPr lang="pt-BR" sz="1050"/>
+              <a:rPr lang="pt-BR" sz="1050" b="1" dirty="0"/>
+              <a:t>www.facens.br</a:t>
+            </a:r>
+            <a:r>
+              <a:rPr lang="pt-BR" sz="1050" dirty="0"/>
               <a:t> </a:t>
             </a:r>
-            <a:endParaRPr sz="1050"/>
+            <a:endParaRPr sz="1050" dirty="0"/>
           </a:p>
           <a:p>
             <a:pPr marL="0" lvl="0" indent="0" algn="ctr" rtl="0">
@@ -27791,17 +27820,17 @@
               <a:buNone/>
             </a:pPr>
             <a:r>
-              <a:rPr lang="pt-BR" sz="1050"/>
+              <a:rPr lang="pt-BR" sz="1050" dirty="0"/>
               <a:t>&lt;-&gt;</a:t>
             </a:r>
             <a:br>
-              <a:rPr lang="pt-BR" sz="1050"/>
+              <a:rPr lang="pt-BR" sz="1050" dirty="0"/>
             </a:br>
             <a:r>
-              <a:rPr lang="pt-BR" sz="1050"/>
+              <a:rPr lang="pt-BR" sz="1050" dirty="0"/>
               <a:t>186.225.102.44</a:t>
             </a:r>
-            <a:endParaRPr sz="1050"/>
+            <a:endParaRPr sz="1050" dirty="0"/>
           </a:p>
         </p:txBody>
       </p:sp>
